--- a/assets/pptx/catalog-546.pptx
+++ b/assets/pptx/catalog-546.pptx
@@ -3247,7 +3247,7 @@
                 <a:ea typeface="Ebrima"/>
                 <a:cs typeface="Ebrima"/>
               </a:rPr>
-              <a:t>አዝ ማራናታ (3x)</a:t>
+              <a:t>አዝ ማራናታ 3x</a:t>
             </a:r>
           </a:p>
           <a:p>
@@ -3265,7 +3265,7 @@
                 <a:ea typeface="Ebrima"/>
                 <a:cs typeface="Ebrima"/>
               </a:rPr>
-              <a:t>ቶሎ ና የኔ ጌታ የኔ ጌታ (2x)</a:t>
+              <a:t>ቶሎ ና የኔ ጌታ የኔ ጌታ 2x</a:t>
             </a:r>
           </a:p>
         </p:txBody>
@@ -3453,7 +3453,7 @@
                 <a:ea typeface="Ebrima"/>
                 <a:cs typeface="Ebrima"/>
               </a:rPr>
-              <a:t>አዝ ማራናታ (3x)</a:t>
+              <a:t>አዝ ማራናታ 3x</a:t>
             </a:r>
           </a:p>
           <a:p>
@@ -3659,7 +3659,7 @@
                 <a:ea typeface="Ebrima"/>
                 <a:cs typeface="Ebrima"/>
               </a:rPr>
-              <a:t>አዝ ማራናታ (3x)</a:t>
+              <a:t>አዝ ማራናታ 3x</a:t>
             </a:r>
           </a:p>
           <a:p>
@@ -3865,7 +3865,7 @@
                 <a:ea typeface="Ebrima"/>
                 <a:cs typeface="Ebrima"/>
               </a:rPr>
-              <a:t>አዝ ማራናታ (3x)</a:t>
+              <a:t>አዝ ማራናታ 3x</a:t>
             </a:r>
           </a:p>
           <a:p>
@@ -3883,7 +3883,7 @@
                 <a:ea typeface="Ebrima"/>
                 <a:cs typeface="Ebrima"/>
               </a:rPr>
-              <a:t>ቶሎ ና የኔ ጌታ የኔ ጌታ (2x)</a:t>
+              <a:t>ቶሎ ና የኔ ጌታ የኔ ጌታ 2x</a:t>
             </a:r>
           </a:p>
         </p:txBody>
